--- a/courses/build/farmer-5day/F-D1.zu.pptx
+++ b/courses/build/farmer-5day/F-D1.zu.pptx
@@ -746,7 +746,7 @@
           </a:p>
           <a:p>
             <a:r>
-              <a:t>Clip F-ANI-04: public/course-animations/reading-landscape/watch-09-sun-shadows.mp4</a:t>
+              <a:t>Clip F-ANI-04: public/course-media/farmer-5day/F-ANI-04.mp4</a:t>
             </a:r>
           </a:p>
         </p:txBody>
@@ -827,7 +827,7 @@
           </a:p>
           <a:p>
             <a:r>
-              <a:t>Clip F-ANI-05: public/course-animations/reading-landscape/watch-05-water-movement.mp4</a:t>
+              <a:t>Clip F-ANI-05: public/course-media/farmer-5day/F-ANI-05.mp4</a:t>
             </a:r>
           </a:p>
         </p:txBody>
@@ -1578,7 +1578,7 @@
           </a:p>
           <a:p>
             <a:r>
-              <a:t>Clip F-ANI-01: public/course-animations/intro-permaculture/watch-07-three-ethics.mp4</a:t>
+              <a:t>Clip F-ANI-01: public/course-media/farmer-5day/F-ANI-01.mp4</a:t>
             </a:r>
           </a:p>
         </p:txBody>
@@ -1811,7 +1811,7 @@
           </a:p>
           <a:p>
             <a:r>
-              <a:t>Clip F-ANI-02: public/course-animations/intro-permaculture/watch-13-diversity.mp4</a:t>
+              <a:t>Clip F-ANI-02: public/course-media/farmer-5day/F-ANI-02.mp4</a:t>
             </a:r>
           </a:p>
         </p:txBody>
@@ -6355,49 +6355,27 @@
           </a:p>
         </p:txBody>
       </p:sp>
-      <p:pic>
-        <p:nvPicPr>
-          <p:cNvPr id="7" name="Picture 6" descr="watch-09-sun-shadows.jpg"/>
-          <p:cNvPicPr>
-            <a:picLocks noChangeAspect="1"/>
-          </p:cNvPicPr>
-          <p:nvPr/>
-        </p:nvPicPr>
-        <p:blipFill>
-          <a:blip r:embed="rId2"/>
-          <a:stretch>
-            <a:fillRect/>
-          </a:stretch>
-        </p:blipFill>
-        <p:spPr>
-          <a:xfrm>
-            <a:off x="5852160" y="2308860"/>
-            <a:ext cx="5852160" cy="3291840"/>
-          </a:xfrm>
-          <a:prstGeom prst="rect">
-            <a:avLst/>
-          </a:prstGeom>
-        </p:spPr>
-      </p:pic>
-      <p:sp>
-        <p:nvSpPr>
-          <p:cNvPr id="8" name="Rectangle 7"/>
+      <p:sp>
+        <p:nvSpPr>
+          <p:cNvPr id="7" name="Rectangle 6"/>
           <p:cNvSpPr/>
           <p:nvPr/>
         </p:nvSpPr>
         <p:spPr>
           <a:xfrm>
-            <a:off x="5852160" y="5806440"/>
-            <a:ext cx="5852160" cy="411480"/>
+            <a:off x="5852160" y="1691640"/>
+            <a:ext cx="5852160" cy="4526280"/>
           </a:xfrm>
           <a:prstGeom prst="rect">
             <a:avLst/>
           </a:prstGeom>
           <a:solidFill>
-            <a:srgbClr val="1B1A17"/>
+            <a:srgbClr val="EFE6D2"/>
           </a:solidFill>
-          <a:ln>
-            <a:noFill/>
+          <a:ln w="15875">
+            <a:solidFill>
+              <a:srgbClr val="2F5D34"/>
+            </a:solidFill>
           </a:ln>
           <a:effectLst/>
         </p:spPr>
@@ -6425,14 +6403,53 @@
       </p:sp>
       <p:sp>
         <p:nvSpPr>
+          <p:cNvPr id="8" name="TextBox 7"/>
+          <p:cNvSpPr txBox="1"/>
+          <p:nvPr/>
+        </p:nvSpPr>
+        <p:spPr>
+          <a:xfrm>
+            <a:off x="6080760" y="1874520"/>
+            <a:ext cx="5394960" cy="365760"/>
+          </a:xfrm>
+          <a:prstGeom prst="rect">
+            <a:avLst/>
+          </a:prstGeom>
+          <a:noFill/>
+        </p:spPr>
+        <p:txBody>
+          <a:bodyPr wrap="square" anchor="t" lIns="45720" rIns="45720">
+            <a:spAutoFit/>
+          </a:bodyPr>
+          <a:lstStyle/>
+          <a:p>
+            <a:pPr algn="l">
+              <a:spcAft>
+                <a:spcPts val="800"/>
+              </a:spcAft>
+            </a:pPr>
+            <a:r>
+              <a:rPr sz="1200" b="1">
+                <a:solidFill>
+                  <a:srgbClr val="B24E2A"/>
+                </a:solidFill>
+                <a:latin typeface="Verdana"/>
+              </a:rPr>
+              <a:t>ANIMATION · F-ANI-04 · coming</a:t>
+            </a:r>
+          </a:p>
+        </p:txBody>
+      </p:sp>
+      <p:sp>
+        <p:nvSpPr>
           <p:cNvPr id="9" name="TextBox 8"/>
           <p:cNvSpPr txBox="1"/>
           <p:nvPr/>
         </p:nvSpPr>
         <p:spPr>
           <a:xfrm>
-            <a:off x="5943600" y="5815584"/>
-            <a:ext cx="5669280" cy="384048"/>
+            <a:off x="6080760" y="2258568"/>
+            <a:ext cx="5394960" cy="457200"/>
           </a:xfrm>
           <a:prstGeom prst="rect">
             <a:avLst/>
@@ -6440,7 +6457,7 @@
           <a:noFill/>
         </p:spPr>
         <p:txBody>
-          <a:bodyPr wrap="square" anchor="ctr" lIns="45720" rIns="45720">
+          <a:bodyPr wrap="square" anchor="t" lIns="45720" rIns="45720">
             <a:spAutoFit/>
           </a:bodyPr>
           <a:lstStyle/>
@@ -6451,13 +6468,52 @@
               </a:spcAft>
             </a:pPr>
             <a:r>
+              <a:rPr sz="1800" b="1">
+                <a:solidFill>
+                  <a:srgbClr val="1B1A17"/>
+                </a:solidFill>
+                <a:latin typeface="Rockwell"/>
+              </a:rPr>
+              <a:t>Sun and shadows</a:t>
+            </a:r>
+          </a:p>
+        </p:txBody>
+      </p:sp>
+      <p:sp>
+        <p:nvSpPr>
+          <p:cNvPr id="10" name="TextBox 9"/>
+          <p:cNvSpPr txBox="1"/>
+          <p:nvPr/>
+        </p:nvSpPr>
+        <p:spPr>
+          <a:xfrm>
+            <a:off x="6080760" y="2788920"/>
+            <a:ext cx="5394960" cy="3246120"/>
+          </a:xfrm>
+          <a:prstGeom prst="rect">
+            <a:avLst/>
+          </a:prstGeom>
+          <a:noFill/>
+        </p:spPr>
+        <p:txBody>
+          <a:bodyPr wrap="square" anchor="t" lIns="45720" rIns="45720">
+            <a:spAutoFit/>
+          </a:bodyPr>
+          <a:lstStyle/>
+          <a:p>
+            <a:pPr algn="l">
+              <a:spcAft>
+                <a:spcPts val="800"/>
+              </a:spcAft>
+            </a:pPr>
+            <a:r>
               <a:rPr sz="1100" b="0">
                 <a:solidFill>
-                  <a:srgbClr val="EFE6D2"/>
+                  <a:srgbClr val="1B1A17"/>
                 </a:solidFill>
                 <a:latin typeface="Verdana"/>
               </a:rPr>
-              <a:t>▶  Clip F-ANI-04 · play from the tablet: watch-09-sun-shadows.mp4</a:t>
+              <a:t>A small house on open ground seen from the side at an angle. The sun travels in a low arc across the NORTH side of the sky from east (right) to west (left); the house's shadow sweeps across the ground on the SOUTH side. Then winter: the arc drops lower and the shadow grows longer. Loops. (Replaces the withdrawn clip…</a:t>
             </a:r>
           </a:p>
         </p:txBody>
@@ -6803,49 +6859,27 @@
           </a:p>
         </p:txBody>
       </p:sp>
-      <p:pic>
-        <p:nvPicPr>
-          <p:cNvPr id="9" name="Picture 8" descr="watch-05-water-movement.jpg"/>
-          <p:cNvPicPr>
-            <a:picLocks noChangeAspect="1"/>
-          </p:cNvPicPr>
-          <p:nvPr/>
-        </p:nvPicPr>
-        <p:blipFill>
-          <a:blip r:embed="rId2"/>
-          <a:stretch>
-            <a:fillRect/>
-          </a:stretch>
-        </p:blipFill>
-        <p:spPr>
-          <a:xfrm>
-            <a:off x="5852160" y="2514600"/>
-            <a:ext cx="5852160" cy="3291840"/>
-          </a:xfrm>
-          <a:prstGeom prst="rect">
-            <a:avLst/>
-          </a:prstGeom>
-        </p:spPr>
-      </p:pic>
-      <p:sp>
-        <p:nvSpPr>
-          <p:cNvPr id="10" name="Rectangle 9"/>
+      <p:sp>
+        <p:nvSpPr>
+          <p:cNvPr id="9" name="Rectangle 8"/>
           <p:cNvSpPr/>
           <p:nvPr/>
         </p:nvSpPr>
         <p:spPr>
           <a:xfrm>
-            <a:off x="5852160" y="5806440"/>
-            <a:ext cx="5852160" cy="411480"/>
+            <a:off x="5852160" y="2103120"/>
+            <a:ext cx="5852160" cy="4114800"/>
           </a:xfrm>
           <a:prstGeom prst="rect">
             <a:avLst/>
           </a:prstGeom>
           <a:solidFill>
-            <a:srgbClr val="1B1A17"/>
+            <a:srgbClr val="EFE6D2"/>
           </a:solidFill>
-          <a:ln>
-            <a:noFill/>
+          <a:ln w="15875">
+            <a:solidFill>
+              <a:srgbClr val="2F5D34"/>
+            </a:solidFill>
           </a:ln>
           <a:effectLst/>
         </p:spPr>
@@ -6873,14 +6907,53 @@
       </p:sp>
       <p:sp>
         <p:nvSpPr>
+          <p:cNvPr id="10" name="TextBox 9"/>
+          <p:cNvSpPr txBox="1"/>
+          <p:nvPr/>
+        </p:nvSpPr>
+        <p:spPr>
+          <a:xfrm>
+            <a:off x="6080760" y="2286000"/>
+            <a:ext cx="5394960" cy="365760"/>
+          </a:xfrm>
+          <a:prstGeom prst="rect">
+            <a:avLst/>
+          </a:prstGeom>
+          <a:noFill/>
+        </p:spPr>
+        <p:txBody>
+          <a:bodyPr wrap="square" anchor="t" lIns="45720" rIns="45720">
+            <a:spAutoFit/>
+          </a:bodyPr>
+          <a:lstStyle/>
+          <a:p>
+            <a:pPr algn="l">
+              <a:spcAft>
+                <a:spcPts val="800"/>
+              </a:spcAft>
+            </a:pPr>
+            <a:r>
+              <a:rPr sz="1200" b="1">
+                <a:solidFill>
+                  <a:srgbClr val="B24E2A"/>
+                </a:solidFill>
+                <a:latin typeface="Verdana"/>
+              </a:rPr>
+              <a:t>ANIMATION · F-ANI-05 · coming</a:t>
+            </a:r>
+          </a:p>
+        </p:txBody>
+      </p:sp>
+      <p:sp>
+        <p:nvSpPr>
           <p:cNvPr id="11" name="TextBox 10"/>
           <p:cNvSpPr txBox="1"/>
           <p:nvPr/>
         </p:nvSpPr>
         <p:spPr>
           <a:xfrm>
-            <a:off x="5943600" y="5815584"/>
-            <a:ext cx="5669280" cy="384048"/>
+            <a:off x="6080760" y="2670048"/>
+            <a:ext cx="5394960" cy="457200"/>
           </a:xfrm>
           <a:prstGeom prst="rect">
             <a:avLst/>
@@ -6888,7 +6961,7 @@
           <a:noFill/>
         </p:spPr>
         <p:txBody>
-          <a:bodyPr wrap="square" anchor="ctr" lIns="45720" rIns="45720">
+          <a:bodyPr wrap="square" anchor="t" lIns="45720" rIns="45720">
             <a:spAutoFit/>
           </a:bodyPr>
           <a:lstStyle/>
@@ -6899,13 +6972,52 @@
               </a:spcAft>
             </a:pPr>
             <a:r>
+              <a:rPr sz="1800" b="1">
+                <a:solidFill>
+                  <a:srgbClr val="1B1A17"/>
+                </a:solidFill>
+                <a:latin typeface="Rockwell"/>
+              </a:rPr>
+              <a:t>Water movement</a:t>
+            </a:r>
+          </a:p>
+        </p:txBody>
+      </p:sp>
+      <p:sp>
+        <p:nvSpPr>
+          <p:cNvPr id="12" name="TextBox 11"/>
+          <p:cNvSpPr txBox="1"/>
+          <p:nvPr/>
+        </p:nvSpPr>
+        <p:spPr>
+          <a:xfrm>
+            <a:off x="6080760" y="3200400"/>
+            <a:ext cx="5394960" cy="2834640"/>
+          </a:xfrm>
+          <a:prstGeom prst="rect">
+            <a:avLst/>
+          </a:prstGeom>
+          <a:noFill/>
+        </p:spPr>
+        <p:txBody>
+          <a:bodyPr wrap="square" anchor="t" lIns="45720" rIns="45720">
+            <a:spAutoFit/>
+          </a:bodyPr>
+          <a:lstStyle/>
+          <a:p>
+            <a:pPr algn="l">
+              <a:spcAft>
+                <a:spcPts val="800"/>
+              </a:spcAft>
+            </a:pPr>
+            <a:r>
               <a:rPr sz="1100" b="0">
                 <a:solidFill>
-                  <a:srgbClr val="EFE6D2"/>
+                  <a:srgbClr val="1B1A17"/>
                 </a:solidFill>
                 <a:latin typeface="Verdana"/>
               </a:rPr>
-              <a:t>▶  Clip F-ANI-05 · play from the tablet: watch-05-water-movement.mp4</a:t>
+              <a:t>A homestead on a gentle slope in a summer storm: rain falls on roof, road and yard; blue flow lines gather into channels and run downhill carrying soil. Then the same slope with stone lines and grass strips, where the water spreads and sinks in. (Replaces the withdrawn clip `reading-landscape/watch-05-water-movement.mp4`.)</a:t>
             </a:r>
           </a:p>
         </p:txBody>
@@ -12368,49 +12480,27 @@
           </a:p>
         </p:txBody>
       </p:sp>
-      <p:pic>
-        <p:nvPicPr>
-          <p:cNvPr id="7" name="Picture 6" descr="watch-13-diversity.jpg"/>
-          <p:cNvPicPr>
-            <a:picLocks noChangeAspect="1"/>
-          </p:cNvPicPr>
-          <p:nvPr/>
-        </p:nvPicPr>
-        <p:blipFill>
-          <a:blip r:embed="rId2"/>
-          <a:stretch>
-            <a:fillRect/>
-          </a:stretch>
-        </p:blipFill>
-        <p:spPr>
-          <a:xfrm>
-            <a:off x="5852160" y="2308860"/>
-            <a:ext cx="5852160" cy="3291840"/>
-          </a:xfrm>
-          <a:prstGeom prst="rect">
-            <a:avLst/>
-          </a:prstGeom>
-        </p:spPr>
-      </p:pic>
-      <p:sp>
-        <p:nvSpPr>
-          <p:cNvPr id="8" name="Rectangle 7"/>
+      <p:sp>
+        <p:nvSpPr>
+          <p:cNvPr id="7" name="Rectangle 6"/>
           <p:cNvSpPr/>
           <p:nvPr/>
         </p:nvSpPr>
         <p:spPr>
           <a:xfrm>
-            <a:off x="5852160" y="5806440"/>
-            <a:ext cx="5852160" cy="411480"/>
+            <a:off x="5852160" y="1691640"/>
+            <a:ext cx="5852160" cy="4526280"/>
           </a:xfrm>
           <a:prstGeom prst="rect">
             <a:avLst/>
           </a:prstGeom>
           <a:solidFill>
-            <a:srgbClr val="1B1A17"/>
+            <a:srgbClr val="EFE6D2"/>
           </a:solidFill>
-          <a:ln>
-            <a:noFill/>
+          <a:ln w="15875">
+            <a:solidFill>
+              <a:srgbClr val="2F5D34"/>
+            </a:solidFill>
           </a:ln>
           <a:effectLst/>
         </p:spPr>
@@ -12438,14 +12528,53 @@
       </p:sp>
       <p:sp>
         <p:nvSpPr>
+          <p:cNvPr id="8" name="TextBox 7"/>
+          <p:cNvSpPr txBox="1"/>
+          <p:nvPr/>
+        </p:nvSpPr>
+        <p:spPr>
+          <a:xfrm>
+            <a:off x="6080760" y="1874520"/>
+            <a:ext cx="5394960" cy="365760"/>
+          </a:xfrm>
+          <a:prstGeom prst="rect">
+            <a:avLst/>
+          </a:prstGeom>
+          <a:noFill/>
+        </p:spPr>
+        <p:txBody>
+          <a:bodyPr wrap="square" anchor="t" lIns="45720" rIns="45720">
+            <a:spAutoFit/>
+          </a:bodyPr>
+          <a:lstStyle/>
+          <a:p>
+            <a:pPr algn="l">
+              <a:spcAft>
+                <a:spcPts val="800"/>
+              </a:spcAft>
+            </a:pPr>
+            <a:r>
+              <a:rPr sz="1200" b="1">
+                <a:solidFill>
+                  <a:srgbClr val="B24E2A"/>
+                </a:solidFill>
+                <a:latin typeface="Verdana"/>
+              </a:rPr>
+              <a:t>ANIMATION · F-ANI-02 · coming</a:t>
+            </a:r>
+          </a:p>
+        </p:txBody>
+      </p:sp>
+      <p:sp>
+        <p:nvSpPr>
           <p:cNvPr id="9" name="TextBox 8"/>
           <p:cNvSpPr txBox="1"/>
           <p:nvPr/>
         </p:nvSpPr>
         <p:spPr>
           <a:xfrm>
-            <a:off x="5943600" y="5815584"/>
-            <a:ext cx="5669280" cy="384048"/>
+            <a:off x="6080760" y="2258568"/>
+            <a:ext cx="5394960" cy="457200"/>
           </a:xfrm>
           <a:prstGeom prst="rect">
             <a:avLst/>
@@ -12453,7 +12582,7 @@
           <a:noFill/>
         </p:spPr>
         <p:txBody>
-          <a:bodyPr wrap="square" anchor="ctr" lIns="45720" rIns="45720">
+          <a:bodyPr wrap="square" anchor="t" lIns="45720" rIns="45720">
             <a:spAutoFit/>
           </a:bodyPr>
           <a:lstStyle/>
@@ -12464,13 +12593,52 @@
               </a:spcAft>
             </a:pPr>
             <a:r>
+              <a:rPr sz="1800" b="1">
+                <a:solidFill>
+                  <a:srgbClr val="1B1A17"/>
+                </a:solidFill>
+                <a:latin typeface="Rockwell"/>
+              </a:rPr>
+              <a:t>Diversity</a:t>
+            </a:r>
+          </a:p>
+        </p:txBody>
+      </p:sp>
+      <p:sp>
+        <p:nvSpPr>
+          <p:cNvPr id="10" name="TextBox 9"/>
+          <p:cNvSpPr txBox="1"/>
+          <p:nvPr/>
+        </p:nvSpPr>
+        <p:spPr>
+          <a:xfrm>
+            <a:off x="6080760" y="2788920"/>
+            <a:ext cx="5394960" cy="3246120"/>
+          </a:xfrm>
+          <a:prstGeom prst="rect">
+            <a:avLst/>
+          </a:prstGeom>
+          <a:noFill/>
+        </p:spPr>
+        <p:txBody>
+          <a:bodyPr wrap="square" anchor="t" lIns="45720" rIns="45720">
+            <a:spAutoFit/>
+          </a:bodyPr>
+          <a:lstStyle/>
+          <a:p>
+            <a:pPr algn="l">
+              <a:spcAft>
+                <a:spcPts val="800"/>
+              </a:spcAft>
+            </a:pPr>
+            <a:r>
               <a:rPr sz="1100" b="0">
                 <a:solidFill>
-                  <a:srgbClr val="EFE6D2"/>
+                  <a:srgbClr val="1B1A17"/>
                 </a:solidFill>
                 <a:latin typeface="Verdana"/>
               </a:rPr>
-              <a:t>▶  Clip F-ANI-02 · play from the tablet: watch-13-diversity.mp4</a:t>
+              <a:t>A bare row of a single crop wilts as pests arrive; beside it a mixed bed (tall grain, climbing bean, spreading pumpkin-like leaves, flowers) stays green while ladybirds and birds visit. Seasons pass and the mixed bed keeps producing. (Replaces the withdrawn clip `intro-permaculture/watch-13-diversity.mp4`.)</a:t>
             </a:r>
           </a:p>
         </p:txBody>
